--- a/e2e/fixtures/test-template.pptx
+++ b/e2e/fixtures/test-template.pptx
@@ -946,6 +946,17 @@
 <file path=ppt/slideLayouts/slideLayout3.xml><?xml version="1.0" encoding="utf-8"?>
 <p:sldLayout xmlns:a="http://schemas.openxmlformats.org/drawingml/2006/main" xmlns:r="http://schemas.openxmlformats.org/officeDocument/2006/relationships" xmlns:p="http://schemas.openxmlformats.org/presentationml/2006/main" type="secHead" preserve="1">
   <p:cSld name="Section Header">
+    <p:bg>
+      <p:bgPr>
+        <a:blipFill>
+          <a:blip r:embed="rId2"/>
+          <a:stretch>
+            <a:fillRect/>
+          </a:stretch>
+        </a:blipFill>
+        <a:effectLst/>
+      </p:bgPr>
+    </p:bg>
     <p:spTree>
       <p:nvGrpSpPr>
         <p:cNvPr id="1" name=""/>
@@ -2645,6 +2656,17 @@
 <file path=ppt/slideMasters/slideMaster1.xml><?xml version="1.0" encoding="utf-8"?>
 <p:sldMaster xmlns:a="http://schemas.openxmlformats.org/drawingml/2006/main" xmlns:r="http://schemas.openxmlformats.org/officeDocument/2006/relationships" xmlns:p="http://schemas.openxmlformats.org/presentationml/2006/main">
   <p:cSld>
+    <p:bg>
+      <p:bgPr>
+        <a:blipFill>
+          <a:blip r:embed="rId14"/>
+          <a:stretch>
+            <a:fillRect/>
+          </a:stretch>
+        </a:blipFill>
+        <a:effectLst/>
+      </p:bgPr>
+    </p:bg>
     <p:bg>
       <p:bgRef idx="1001">
         <a:schemeClr val="bg1"/>

--- a/e2e/fixtures/test-template.pptx
+++ b/e2e/fixtures/test-template.pptx
@@ -2666,11 +2666,6 @@
         </a:blipFill>
         <a:effectLst/>
       </p:bgPr>
-    </p:bg>
-    <p:bg>
-      <p:bgRef idx="1001">
-        <a:schemeClr val="bg1"/>
-      </p:bgRef>
     </p:bg>
     <p:spTree>
       <p:nvGrpSpPr>
